--- a/Diplomarbeit/doc/Schaar/Ultraschall-Laser-Sensoren-ToF-Prinzip.pptx
+++ b/Diplomarbeit/doc/Schaar/Ultraschall-Laser-Sensoren-ToF-Prinzip.pptx
@@ -197,7 +197,7 @@
           <a:p>
             <a:fld id="{EF4929A9-E944-459A-A902-19A3AFC66D15}" type="datetimeFigureOut">
               <a:rPr lang="de-AT" smtClean="0"/>
-              <a:t>19.02.2026</a:t>
+              <a:t>21.02.2026</a:t>
             </a:fld>
             <a:endParaRPr lang="de-AT"/>
           </a:p>
@@ -698,7 +698,7 @@
           <a:p>
             <a:fld id="{DF454D19-1CBA-428A-9FFC-0CBF0660AB44}" type="datetimeFigureOut">
               <a:rPr lang="de-AT" smtClean="0"/>
-              <a:t>19.02.2026</a:t>
+              <a:t>21.02.2026</a:t>
             </a:fld>
             <a:endParaRPr lang="de-AT"/>
           </a:p>
@@ -898,7 +898,7 @@
           <a:p>
             <a:fld id="{DF454D19-1CBA-428A-9FFC-0CBF0660AB44}" type="datetimeFigureOut">
               <a:rPr lang="de-AT" smtClean="0"/>
-              <a:t>19.02.2026</a:t>
+              <a:t>21.02.2026</a:t>
             </a:fld>
             <a:endParaRPr lang="de-AT"/>
           </a:p>
@@ -1108,7 +1108,7 @@
           <a:p>
             <a:fld id="{DF454D19-1CBA-428A-9FFC-0CBF0660AB44}" type="datetimeFigureOut">
               <a:rPr lang="de-AT" smtClean="0"/>
-              <a:t>19.02.2026</a:t>
+              <a:t>21.02.2026</a:t>
             </a:fld>
             <a:endParaRPr lang="de-AT"/>
           </a:p>
@@ -1308,7 +1308,7 @@
           <a:p>
             <a:fld id="{DF454D19-1CBA-428A-9FFC-0CBF0660AB44}" type="datetimeFigureOut">
               <a:rPr lang="de-AT" smtClean="0"/>
-              <a:t>19.02.2026</a:t>
+              <a:t>21.02.2026</a:t>
             </a:fld>
             <a:endParaRPr lang="de-AT"/>
           </a:p>
@@ -1584,7 +1584,7 @@
           <a:p>
             <a:fld id="{DF454D19-1CBA-428A-9FFC-0CBF0660AB44}" type="datetimeFigureOut">
               <a:rPr lang="de-AT" smtClean="0"/>
-              <a:t>19.02.2026</a:t>
+              <a:t>21.02.2026</a:t>
             </a:fld>
             <a:endParaRPr lang="de-AT"/>
           </a:p>
@@ -1852,7 +1852,7 @@
           <a:p>
             <a:fld id="{DF454D19-1CBA-428A-9FFC-0CBF0660AB44}" type="datetimeFigureOut">
               <a:rPr lang="de-AT" smtClean="0"/>
-              <a:t>19.02.2026</a:t>
+              <a:t>21.02.2026</a:t>
             </a:fld>
             <a:endParaRPr lang="de-AT"/>
           </a:p>
@@ -2267,7 +2267,7 @@
           <a:p>
             <a:fld id="{DF454D19-1CBA-428A-9FFC-0CBF0660AB44}" type="datetimeFigureOut">
               <a:rPr lang="de-AT" smtClean="0"/>
-              <a:t>19.02.2026</a:t>
+              <a:t>21.02.2026</a:t>
             </a:fld>
             <a:endParaRPr lang="de-AT"/>
           </a:p>
@@ -2409,7 +2409,7 @@
           <a:p>
             <a:fld id="{DF454D19-1CBA-428A-9FFC-0CBF0660AB44}" type="datetimeFigureOut">
               <a:rPr lang="de-AT" smtClean="0"/>
-              <a:t>19.02.2026</a:t>
+              <a:t>21.02.2026</a:t>
             </a:fld>
             <a:endParaRPr lang="de-AT"/>
           </a:p>
@@ -2522,7 +2522,7 @@
           <a:p>
             <a:fld id="{DF454D19-1CBA-428A-9FFC-0CBF0660AB44}" type="datetimeFigureOut">
               <a:rPr lang="de-AT" smtClean="0"/>
-              <a:t>19.02.2026</a:t>
+              <a:t>21.02.2026</a:t>
             </a:fld>
             <a:endParaRPr lang="de-AT"/>
           </a:p>
@@ -2835,7 +2835,7 @@
           <a:p>
             <a:fld id="{DF454D19-1CBA-428A-9FFC-0CBF0660AB44}" type="datetimeFigureOut">
               <a:rPr lang="de-AT" smtClean="0"/>
-              <a:t>19.02.2026</a:t>
+              <a:t>21.02.2026</a:t>
             </a:fld>
             <a:endParaRPr lang="de-AT"/>
           </a:p>
@@ -3124,7 +3124,7 @@
           <a:p>
             <a:fld id="{DF454D19-1CBA-428A-9FFC-0CBF0660AB44}" type="datetimeFigureOut">
               <a:rPr lang="de-AT" smtClean="0"/>
-              <a:t>19.02.2026</a:t>
+              <a:t>21.02.2026</a:t>
             </a:fld>
             <a:endParaRPr lang="de-AT"/>
           </a:p>
@@ -3367,7 +3367,7 @@
           <a:p>
             <a:fld id="{DF454D19-1CBA-428A-9FFC-0CBF0660AB44}" type="datetimeFigureOut">
               <a:rPr lang="de-AT" smtClean="0"/>
-              <a:t>19.02.2026</a:t>
+              <a:t>21.02.2026</a:t>
             </a:fld>
             <a:endParaRPr lang="de-AT"/>
           </a:p>
